--- a/dist/초1/국어/한글/초1_국어_한글_03_받침없는글자_학생용.pptx
+++ b/dist/초1/국어/한글/초1_국어_한글_03_받침없는글자_학생용.pptx
@@ -119,20 +119,20 @@
   <p:extLst>
     <p:ext uri="{521415D9-36F7-43E2-AB2F-B90AF26B5E84}">
       <p14:sectionLst xmlns:p14="http://schemas.microsoft.com/office/powerpoint/2010/main">
-        <p14:section name="도입" id="{54dc642b-c620-0ad9-bb37-45b6044f16d7}">
+        <p14:section name="도입" id="{97ee13c8-de42-ccba-ed84-5a55328ad397}">
           <p14:sldIdLst>
             <p14:sldId id="256"/>
             <p14:sldId id="257"/>
           </p14:sldIdLst>
         </p14:section>
-        <p14:section name="개념" id="{da9d7553-5fa7-e88c-163c-6433eeed7cfb}">
+        <p14:section name="개념" id="{79d64114-1a34-a0a1-9584-27aa3a55d237}">
           <p14:sldIdLst>
             <p14:sldId id="258"/>
             <p14:sldId id="259"/>
             <p14:sldId id="260"/>
           </p14:sldIdLst>
         </p14:section>
-        <p14:section name="연습" id="{f619fd7a-32ed-3540-f2e3-0155eb40cf78}">
+        <p14:section name="연습" id="{4096b982-dca4-1e52-8ac0-078ecd51e67d}">
           <p14:sldIdLst>
             <p14:sldId id="261"/>
             <p14:sldId id="262"/>
@@ -140,18 +140,18 @@
             <p14:sldId id="264"/>
           </p14:sldIdLst>
         </p14:section>
-        <p14:section name="확인" id="{dac4c67d-a841-5d04-fe22-499d7fdf240b}">
+        <p14:section name="확인" id="{403bb986-4515-9608-f140-cf2d25d2c055}">
           <p14:sldIdLst>
             <p14:sldId id="265"/>
             <p14:sldId id="266"/>
           </p14:sldIdLst>
         </p14:section>
-        <p14:section name="정리" id="{f602f0a3-868b-7e61-598d-467196e4298a}">
+        <p14:section name="정리" id="{ae73690c-a952-7982-4b99-f76718354ad5}">
           <p14:sldIdLst>
             <p14:sldId id="267"/>
           </p14:sldIdLst>
         </p14:section>
-        <p14:section name="보충" id="{dba4bde9-6ef3-2395-716e-802b36001022}">
+        <p14:section name="보충" id="{4b5eead7-4216-9b25-8b71-9b75045f261f}">
           <p14:sldIdLst>
             <p14:sldId id="268"/>
           </p14:sldIdLst>
@@ -2762,12 +2762,12 @@
         </p:nvSpPr>
         <p:spPr>
           <a:xfrm>
-            <a:off x="7680960" y="1514856"/>
-            <a:ext cx="1176528" cy="1176528"/>
+            <a:off x="7936992" y="1600200"/>
+            <a:ext cx="1005840" cy="1005840"/>
           </a:xfrm>
           <a:prstGeom prst="roundRect">
             <a:avLst>
-              <a:gd name="adj" fmla="val 10881"/>
+              <a:gd name="adj" fmla="val 12727"/>
             </a:avLst>
           </a:prstGeom>
           <a:solidFill>
@@ -2787,7 +2787,7 @@
               <a:buNone/>
             </a:pPr>
             <a:r>
-              <a:rPr lang="ko-KR" altLang="en-US" sz="5100" b="1" dirty="0">
+              <a:rPr lang="ko-KR" altLang="en-US" sz="4400" b="1" dirty="0">
                 <a:solidFill>
                   <a:srgbClr val="1F2937"/>
                 </a:solidFill>
@@ -2797,7 +2797,7 @@
               </a:rPr>
               <a:t>ㄱ</a:t>
             </a:r>
-            <a:endParaRPr lang="ko-KR" sz="5100" dirty="0"/>
+            <a:endParaRPr lang="ko-KR" sz="4400" dirty="0"/>
           </a:p>
         </p:txBody>
       </p:sp>
@@ -2809,12 +2809,12 @@
         </p:nvSpPr>
         <p:spPr>
           <a:xfrm>
-            <a:off x="9058656" y="1514856"/>
-            <a:ext cx="1176528" cy="1176528"/>
+            <a:off x="9144000" y="1600200"/>
+            <a:ext cx="1005840" cy="1005840"/>
           </a:xfrm>
           <a:prstGeom prst="roundRect">
             <a:avLst>
-              <a:gd name="adj" fmla="val 10881"/>
+              <a:gd name="adj" fmla="val 12727"/>
             </a:avLst>
           </a:prstGeom>
           <a:solidFill>
@@ -2834,7 +2834,7 @@
               <a:buNone/>
             </a:pPr>
             <a:r>
-              <a:rPr lang="ko-KR" altLang="en-US" sz="5100" b="1" dirty="0">
+              <a:rPr lang="ko-KR" altLang="en-US" sz="4400" b="1" dirty="0">
                 <a:solidFill>
                   <a:srgbClr val="1F2937"/>
                 </a:solidFill>
@@ -2844,7 +2844,7 @@
               </a:rPr>
               <a:t>ㅏ</a:t>
             </a:r>
-            <a:endParaRPr lang="ko-KR" sz="5100" dirty="0"/>
+            <a:endParaRPr lang="ko-KR" sz="4400" dirty="0"/>
           </a:p>
         </p:txBody>
       </p:sp>
@@ -2856,12 +2856,12 @@
         </p:nvSpPr>
         <p:spPr>
           <a:xfrm>
-            <a:off x="10436352" y="1514856"/>
-            <a:ext cx="1176528" cy="1176528"/>
+            <a:off x="10351008" y="1600200"/>
+            <a:ext cx="1005840" cy="1005840"/>
           </a:xfrm>
           <a:prstGeom prst="roundRect">
             <a:avLst>
-              <a:gd name="adj" fmla="val 10881"/>
+              <a:gd name="adj" fmla="val 12727"/>
             </a:avLst>
           </a:prstGeom>
           <a:solidFill>
@@ -2881,7 +2881,7 @@
               <a:buNone/>
             </a:pPr>
             <a:r>
-              <a:rPr lang="ko-KR" altLang="en-US" sz="5100" b="1" dirty="0">
+              <a:rPr lang="ko-KR" altLang="en-US" sz="4400" b="1" dirty="0">
                 <a:solidFill>
                   <a:srgbClr val="1F2937"/>
                 </a:solidFill>
@@ -2891,7 +2891,7 @@
               </a:rPr>
               <a:t>가</a:t>
             </a:r>
-            <a:endParaRPr lang="ko-KR" sz="5100" dirty="0"/>
+            <a:endParaRPr lang="ko-KR" sz="4400" dirty="0"/>
           </a:p>
         </p:txBody>
       </p:sp>

--- a/dist/초1/국어/한글/초1_국어_한글_03_받침없는글자_학생용.pptx
+++ b/dist/초1/국어/한글/초1_국어_한글_03_받침없는글자_학생용.pptx
@@ -119,20 +119,20 @@
   <p:extLst>
     <p:ext uri="{521415D9-36F7-43E2-AB2F-B90AF26B5E84}">
       <p14:sectionLst xmlns:p14="http://schemas.microsoft.com/office/powerpoint/2010/main">
-        <p14:section name="도입" id="{97ee13c8-de42-ccba-ed84-5a55328ad397}">
+        <p14:section name="도입" id="{20c31dba-bc3b-01a2-eb8a-c22204e7bea8}">
           <p14:sldIdLst>
             <p14:sldId id="256"/>
             <p14:sldId id="257"/>
           </p14:sldIdLst>
         </p14:section>
-        <p14:section name="개념" id="{79d64114-1a34-a0a1-9584-27aa3a55d237}">
+        <p14:section name="개념" id="{baee1cf8-a10c-191a-3d09-89b4f72dbd87}">
           <p14:sldIdLst>
             <p14:sldId id="258"/>
             <p14:sldId id="259"/>
             <p14:sldId id="260"/>
           </p14:sldIdLst>
         </p14:section>
-        <p14:section name="연습" id="{4096b982-dca4-1e52-8ac0-078ecd51e67d}">
+        <p14:section name="연습" id="{59eb1a63-e420-ffd9-f85e-267d22742c45}">
           <p14:sldIdLst>
             <p14:sldId id="261"/>
             <p14:sldId id="262"/>
@@ -140,18 +140,18 @@
             <p14:sldId id="264"/>
           </p14:sldIdLst>
         </p14:section>
-        <p14:section name="확인" id="{403bb986-4515-9608-f140-cf2d25d2c055}">
+        <p14:section name="확인" id="{4fdf7164-8bad-c56d-8769-ab8a3e4609f5}">
           <p14:sldIdLst>
             <p14:sldId id="265"/>
             <p14:sldId id="266"/>
           </p14:sldIdLst>
         </p14:section>
-        <p14:section name="정리" id="{ae73690c-a952-7982-4b99-f76718354ad5}">
+        <p14:section name="정리" id="{1758be5f-b2ce-d520-494b-34f07ccb4de0}">
           <p14:sldIdLst>
             <p14:sldId id="267"/>
           </p14:sldIdLst>
         </p14:section>
-        <p14:section name="보충" id="{4b5eead7-4216-9b25-8b71-9b75045f261f}">
+        <p14:section name="보충" id="{0747509c-3cbe-0090-76ab-29ea0da0600b}">
           <p14:sldIdLst>
             <p14:sldId id="268"/>
           </p14:sldIdLst>
@@ -3165,7 +3165,7 @@
         <p:spPr>
           <a:xfrm>
             <a:off x="1344168" y="2011680"/>
-            <a:ext cx="1965960" cy="1280160"/>
+            <a:ext cx="2606040" cy="1280160"/>
           </a:xfrm>
           <a:prstGeom prst="roundRect">
             <a:avLst>
@@ -3211,8 +3211,8 @@
         </p:nvSpPr>
         <p:spPr>
           <a:xfrm>
-            <a:off x="3584448" y="2011680"/>
-            <a:ext cx="1965960" cy="1280160"/>
+            <a:off x="4224528" y="2011680"/>
+            <a:ext cx="2606040" cy="1280160"/>
           </a:xfrm>
           <a:prstGeom prst="roundRect">
             <a:avLst>
@@ -3306,7 +3306,7 @@
         <p:spPr>
           <a:xfrm>
             <a:off x="1344168" y="3474720"/>
-            <a:ext cx="1965960" cy="1280160"/>
+            <a:ext cx="2606040" cy="1280160"/>
           </a:xfrm>
           <a:prstGeom prst="roundRect">
             <a:avLst>
@@ -3352,8 +3352,8 @@
         </p:nvSpPr>
         <p:spPr>
           <a:xfrm>
-            <a:off x="3584448" y="3474720"/>
-            <a:ext cx="1965960" cy="1280160"/>
+            <a:off x="4224528" y="3474720"/>
+            <a:ext cx="2606040" cy="1280160"/>
           </a:xfrm>
           <a:prstGeom prst="roundRect">
             <a:avLst>
@@ -5343,7 +5343,7 @@
         </p:nvSpPr>
         <p:spPr>
           <a:xfrm>
-            <a:off x="548640" y="2459736"/>
+            <a:off x="548640" y="2734056"/>
             <a:ext cx="566928" cy="566928"/>
           </a:xfrm>
           <a:prstGeom prst="roundRect">
@@ -5390,12 +5390,12 @@
         </p:nvSpPr>
         <p:spPr>
           <a:xfrm>
-            <a:off x="1344168" y="2109216"/>
-            <a:ext cx="1267968" cy="1267968"/>
+            <a:off x="1828800" y="2331720"/>
+            <a:ext cx="1371600" cy="1371600"/>
           </a:xfrm>
           <a:prstGeom prst="roundRect">
             <a:avLst>
-              <a:gd name="adj" fmla="val 10096"/>
+              <a:gd name="adj" fmla="val 9333"/>
             </a:avLst>
           </a:prstGeom>
           <a:solidFill>
@@ -5415,7 +5415,7 @@
               <a:buNone/>
             </a:pPr>
             <a:r>
-              <a:rPr lang="ko-KR" altLang="en-US" sz="5500" b="1" dirty="0">
+              <a:rPr lang="ko-KR" altLang="en-US" sz="5900" b="1" dirty="0">
                 <a:solidFill>
                   <a:srgbClr val="1F2937"/>
                 </a:solidFill>
@@ -5425,7 +5425,7 @@
               </a:rPr>
               <a:t>ㄴ</a:t>
             </a:r>
-            <a:endParaRPr lang="ko-KR" sz="5500" dirty="0"/>
+            <a:endParaRPr lang="ko-KR" sz="5900" dirty="0"/>
           </a:p>
         </p:txBody>
       </p:sp>
@@ -5437,12 +5437,12 @@
         </p:nvSpPr>
         <p:spPr>
           <a:xfrm>
-            <a:off x="2813304" y="2109216"/>
-            <a:ext cx="1267968" cy="1267968"/>
+            <a:off x="3401568" y="2331720"/>
+            <a:ext cx="1371600" cy="1371600"/>
           </a:xfrm>
           <a:prstGeom prst="roundRect">
             <a:avLst>
-              <a:gd name="adj" fmla="val 10096"/>
+              <a:gd name="adj" fmla="val 9333"/>
             </a:avLst>
           </a:prstGeom>
           <a:solidFill>
@@ -5462,7 +5462,7 @@
               <a:buNone/>
             </a:pPr>
             <a:r>
-              <a:rPr lang="ko-KR" altLang="en-US" sz="5500" b="1" dirty="0">
+              <a:rPr lang="ko-KR" altLang="en-US" sz="5900" b="1" dirty="0">
                 <a:solidFill>
                   <a:srgbClr val="1F2937"/>
                 </a:solidFill>
@@ -5472,7 +5472,7 @@
               </a:rPr>
               <a:t>ㅁ</a:t>
             </a:r>
-            <a:endParaRPr lang="ko-KR" sz="5500" dirty="0"/>
+            <a:endParaRPr lang="ko-KR" sz="5900" dirty="0"/>
           </a:p>
         </p:txBody>
       </p:sp>
@@ -5484,12 +5484,12 @@
         </p:nvSpPr>
         <p:spPr>
           <a:xfrm>
-            <a:off x="4282440" y="2109216"/>
-            <a:ext cx="1267968" cy="1267968"/>
+            <a:off x="4974336" y="2331720"/>
+            <a:ext cx="1371600" cy="1371600"/>
           </a:xfrm>
           <a:prstGeom prst="roundRect">
             <a:avLst>
-              <a:gd name="adj" fmla="val 10096"/>
+              <a:gd name="adj" fmla="val 9333"/>
             </a:avLst>
           </a:prstGeom>
           <a:solidFill>
@@ -5509,7 +5509,7 @@
               <a:buNone/>
             </a:pPr>
             <a:r>
-              <a:rPr lang="ko-KR" altLang="en-US" sz="5500" b="1" dirty="0">
+              <a:rPr lang="ko-KR" altLang="en-US" sz="5900" b="1" dirty="0">
                 <a:solidFill>
                   <a:srgbClr val="1F2937"/>
                 </a:solidFill>
@@ -5519,7 +5519,7 @@
               </a:rPr>
               <a:t>ㅅ</a:t>
             </a:r>
-            <a:endParaRPr lang="ko-KR" sz="5500" dirty="0"/>
+            <a:endParaRPr lang="ko-KR" sz="5900" dirty="0"/>
           </a:p>
         </p:txBody>
       </p:sp>
@@ -5531,7 +5531,7 @@
         </p:nvSpPr>
         <p:spPr>
           <a:xfrm>
-            <a:off x="548640" y="4654296"/>
+            <a:off x="548640" y="4928616"/>
             <a:ext cx="566928" cy="566928"/>
           </a:xfrm>
           <a:prstGeom prst="roundRect">
@@ -5578,12 +5578,12 @@
         </p:nvSpPr>
         <p:spPr>
           <a:xfrm>
-            <a:off x="1344168" y="4303776"/>
-            <a:ext cx="1267968" cy="1267968"/>
+            <a:off x="1828800" y="4526280"/>
+            <a:ext cx="1371600" cy="1371600"/>
           </a:xfrm>
           <a:prstGeom prst="roundRect">
             <a:avLst>
-              <a:gd name="adj" fmla="val 10096"/>
+              <a:gd name="adj" fmla="val 9333"/>
             </a:avLst>
           </a:prstGeom>
           <a:solidFill>
@@ -5603,7 +5603,7 @@
               <a:buNone/>
             </a:pPr>
             <a:r>
-              <a:rPr lang="ko-KR" altLang="en-US" sz="5500" b="1" dirty="0">
+              <a:rPr lang="ko-KR" altLang="en-US" sz="5900" b="1" dirty="0">
                 <a:solidFill>
                   <a:srgbClr val="1F2937"/>
                 </a:solidFill>
@@ -5613,7 +5613,7 @@
               </a:rPr>
               <a:t>ㅏ</a:t>
             </a:r>
-            <a:endParaRPr lang="ko-KR" sz="5500" dirty="0"/>
+            <a:endParaRPr lang="ko-KR" sz="5900" dirty="0"/>
           </a:p>
         </p:txBody>
       </p:sp>
@@ -5625,12 +5625,12 @@
         </p:nvSpPr>
         <p:spPr>
           <a:xfrm>
-            <a:off x="2813304" y="4303776"/>
-            <a:ext cx="1267968" cy="1267968"/>
+            <a:off x="3401568" y="4526280"/>
+            <a:ext cx="1371600" cy="1371600"/>
           </a:xfrm>
           <a:prstGeom prst="roundRect">
             <a:avLst>
-              <a:gd name="adj" fmla="val 10096"/>
+              <a:gd name="adj" fmla="val 9333"/>
             </a:avLst>
           </a:prstGeom>
           <a:solidFill>
@@ -5650,7 +5650,7 @@
               <a:buNone/>
             </a:pPr>
             <a:r>
-              <a:rPr lang="ko-KR" altLang="en-US" sz="5500" b="1" dirty="0">
+              <a:rPr lang="ko-KR" altLang="en-US" sz="5900" b="1" dirty="0">
                 <a:solidFill>
                   <a:srgbClr val="1F2937"/>
                 </a:solidFill>
@@ -5660,7 +5660,7 @@
               </a:rPr>
               <a:t>ㅗ</a:t>
             </a:r>
-            <a:endParaRPr lang="ko-KR" sz="5500" dirty="0"/>
+            <a:endParaRPr lang="ko-KR" sz="5900" dirty="0"/>
           </a:p>
         </p:txBody>
       </p:sp>
@@ -5672,12 +5672,12 @@
         </p:nvSpPr>
         <p:spPr>
           <a:xfrm>
-            <a:off x="4282440" y="4303776"/>
-            <a:ext cx="1267968" cy="1267968"/>
+            <a:off x="4974336" y="4526280"/>
+            <a:ext cx="1371600" cy="1371600"/>
           </a:xfrm>
           <a:prstGeom prst="roundRect">
             <a:avLst>
-              <a:gd name="adj" fmla="val 10096"/>
+              <a:gd name="adj" fmla="val 9333"/>
             </a:avLst>
           </a:prstGeom>
           <a:solidFill>
@@ -5697,7 +5697,7 @@
               <a:buNone/>
             </a:pPr>
             <a:r>
-              <a:rPr lang="ko-KR" altLang="en-US" sz="5500" b="1" dirty="0">
+              <a:rPr lang="ko-KR" altLang="en-US" sz="5900" b="1" dirty="0">
                 <a:solidFill>
                   <a:srgbClr val="1F2937"/>
                 </a:solidFill>
@@ -5707,7 +5707,7 @@
               </a:rPr>
               <a:t>ㅣ</a:t>
             </a:r>
-            <a:endParaRPr lang="ko-KR" sz="5500" dirty="0"/>
+            <a:endParaRPr lang="ko-KR" sz="5900" dirty="0"/>
           </a:p>
         </p:txBody>
       </p:sp>
@@ -7456,7 +7456,7 @@
                         <a:buNone/>
                       </a:pPr>
                       <a:r>
-                        <a:rPr lang="en-US" sz="3200" b="1" dirty="0">
+                        <a:rPr lang="en-US" sz="4500" b="1" dirty="0">
                           <a:solidFill>
                             <a:srgbClr val="1F2937"/>
                           </a:solidFill>
@@ -7466,7 +7466,7 @@
                         </a:rPr>
                         <a:t>ㅏ</a:t>
                       </a:r>
-                      <a:endParaRPr lang="en-US" sz="3200" dirty="0">
+                      <a:endParaRPr lang="en-US" sz="4500" dirty="0">
                         <a:latin typeface="맑은 고딕" charset="0"/>
                         <a:ea typeface="맑은 고딕" charset="0"/>
                         <a:cs typeface="맑은 고딕" charset="0"/>
@@ -7524,7 +7524,7 @@
                         <a:buNone/>
                       </a:pPr>
                       <a:r>
-                        <a:rPr lang="en-US" sz="3200" b="1" dirty="0">
+                        <a:rPr lang="en-US" sz="4500" b="1" dirty="0">
                           <a:solidFill>
                             <a:srgbClr val="1F2937"/>
                           </a:solidFill>
@@ -7534,7 +7534,7 @@
                         </a:rPr>
                         <a:t>ㅓ</a:t>
                       </a:r>
-                      <a:endParaRPr lang="en-US" sz="3200" dirty="0">
+                      <a:endParaRPr lang="en-US" sz="4500" dirty="0">
                         <a:latin typeface="맑은 고딕" charset="0"/>
                         <a:ea typeface="맑은 고딕" charset="0"/>
                         <a:cs typeface="맑은 고딕" charset="0"/>
@@ -7592,7 +7592,7 @@
                         <a:buNone/>
                       </a:pPr>
                       <a:r>
-                        <a:rPr lang="en-US" sz="3200" b="1" dirty="0">
+                        <a:rPr lang="en-US" sz="4500" b="1" dirty="0">
                           <a:solidFill>
                             <a:srgbClr val="1F2937"/>
                           </a:solidFill>
@@ -7602,7 +7602,7 @@
                         </a:rPr>
                         <a:t>ㅗ</a:t>
                       </a:r>
-                      <a:endParaRPr lang="en-US" sz="3200" dirty="0">
+                      <a:endParaRPr lang="en-US" sz="4500" dirty="0">
                         <a:latin typeface="맑은 고딕" charset="0"/>
                         <a:ea typeface="맑은 고딕" charset="0"/>
                         <a:cs typeface="맑은 고딕" charset="0"/>
@@ -7660,7 +7660,7 @@
                         <a:buNone/>
                       </a:pPr>
                       <a:r>
-                        <a:rPr lang="en-US" sz="3200" b="1" dirty="0">
+                        <a:rPr lang="en-US" sz="4500" b="1" dirty="0">
                           <a:solidFill>
                             <a:srgbClr val="1F2937"/>
                           </a:solidFill>
@@ -7670,7 +7670,7 @@
                         </a:rPr>
                         <a:t>ㅜ</a:t>
                       </a:r>
-                      <a:endParaRPr lang="en-US" sz="3200" dirty="0">
+                      <a:endParaRPr lang="en-US" sz="4500" dirty="0">
                         <a:latin typeface="맑은 고딕" charset="0"/>
                         <a:ea typeface="맑은 고딕" charset="0"/>
                         <a:cs typeface="맑은 고딕" charset="0"/>
@@ -7728,7 +7728,7 @@
                         <a:buNone/>
                       </a:pPr>
                       <a:r>
-                        <a:rPr lang="en-US" sz="3200" b="1" dirty="0">
+                        <a:rPr lang="en-US" sz="4500" b="1" dirty="0">
                           <a:solidFill>
                             <a:srgbClr val="1F2937"/>
                           </a:solidFill>
@@ -7738,7 +7738,7 @@
                         </a:rPr>
                         <a:t>ㅣ</a:t>
                       </a:r>
-                      <a:endParaRPr lang="en-US" sz="3200" dirty="0">
+                      <a:endParaRPr lang="en-US" sz="4500" dirty="0">
                         <a:latin typeface="맑은 고딕" charset="0"/>
                         <a:ea typeface="맑은 고딕" charset="0"/>
                         <a:cs typeface="맑은 고딕" charset="0"/>
@@ -7798,7 +7798,7 @@
                         <a:buNone/>
                       </a:pPr>
                       <a:r>
-                        <a:rPr lang="en-US" sz="3200" b="1" dirty="0">
+                        <a:rPr lang="en-US" sz="4500" b="1" dirty="0">
                           <a:solidFill>
                             <a:srgbClr val="1F2937"/>
                           </a:solidFill>
@@ -7808,7 +7808,7 @@
                         </a:rPr>
                         <a:t>ㄱ</a:t>
                       </a:r>
-                      <a:endParaRPr lang="en-US" sz="3200" dirty="0">
+                      <a:endParaRPr lang="en-US" sz="4500" dirty="0">
                         <a:latin typeface="맑은 고딕" charset="0"/>
                         <a:ea typeface="맑은 고딕" charset="0"/>
                         <a:cs typeface="맑은 고딕" charset="0"/>
@@ -8208,7 +8208,7 @@
                         <a:buNone/>
                       </a:pPr>
                       <a:r>
-                        <a:rPr lang="en-US" sz="3200" b="1" dirty="0">
+                        <a:rPr lang="en-US" sz="4500" b="1" dirty="0">
                           <a:solidFill>
                             <a:srgbClr val="1F2937"/>
                           </a:solidFill>
@@ -8218,7 +8218,7 @@
                         </a:rPr>
                         <a:t>ㄴ</a:t>
                       </a:r>
-                      <a:endParaRPr lang="en-US" sz="3200" dirty="0">
+                      <a:endParaRPr lang="en-US" sz="4500" dirty="0">
                         <a:latin typeface="맑은 고딕" charset="0"/>
                         <a:ea typeface="맑은 고딕" charset="0"/>
                         <a:cs typeface="맑은 고딕" charset="0"/>
@@ -8618,7 +8618,7 @@
                         <a:buNone/>
                       </a:pPr>
                       <a:r>
-                        <a:rPr lang="en-US" sz="3200" b="1" dirty="0">
+                        <a:rPr lang="en-US" sz="4500" b="1" dirty="0">
                           <a:solidFill>
                             <a:srgbClr val="1F2937"/>
                           </a:solidFill>
@@ -8628,7 +8628,7 @@
                         </a:rPr>
                         <a:t>ㄷ</a:t>
                       </a:r>
-                      <a:endParaRPr lang="en-US" sz="3200" dirty="0">
+                      <a:endParaRPr lang="en-US" sz="4500" dirty="0">
                         <a:latin typeface="맑은 고딕" charset="0"/>
                         <a:ea typeface="맑은 고딕" charset="0"/>
                         <a:cs typeface="맑은 고딕" charset="0"/>
@@ -9028,7 +9028,7 @@
                         <a:buNone/>
                       </a:pPr>
                       <a:r>
-                        <a:rPr lang="en-US" sz="3200" b="1" dirty="0">
+                        <a:rPr lang="en-US" sz="4500" b="1" dirty="0">
                           <a:solidFill>
                             <a:srgbClr val="1F2937"/>
                           </a:solidFill>
@@ -9038,7 +9038,7 @@
                         </a:rPr>
                         <a:t>ㄹ</a:t>
                       </a:r>
-                      <a:endParaRPr lang="en-US" sz="3200" dirty="0">
+                      <a:endParaRPr lang="en-US" sz="4500" dirty="0">
                         <a:latin typeface="맑은 고딕" charset="0"/>
                         <a:ea typeface="맑은 고딕" charset="0"/>
                         <a:cs typeface="맑은 고딕" charset="0"/>
@@ -9438,7 +9438,7 @@
                         <a:buNone/>
                       </a:pPr>
                       <a:r>
-                        <a:rPr lang="en-US" sz="3200" b="1" dirty="0">
+                        <a:rPr lang="en-US" sz="4500" b="1" dirty="0">
                           <a:solidFill>
                             <a:srgbClr val="1F2937"/>
                           </a:solidFill>
@@ -9448,7 +9448,7 @@
                         </a:rPr>
                         <a:t>ㅁ</a:t>
                       </a:r>
-                      <a:endParaRPr lang="en-US" sz="3200" dirty="0">
+                      <a:endParaRPr lang="en-US" sz="4500" dirty="0">
                         <a:latin typeface="맑은 고딕" charset="0"/>
                         <a:ea typeface="맑은 고딕" charset="0"/>
                         <a:cs typeface="맑은 고딕" charset="0"/>
@@ -10527,7 +10527,7 @@
                         <a:buNone/>
                       </a:pPr>
                       <a:r>
-                        <a:rPr lang="en-US" sz="3200" b="1" dirty="0">
+                        <a:rPr lang="en-US" sz="4500" b="1" dirty="0">
                           <a:solidFill>
                             <a:srgbClr val="1F2937"/>
                           </a:solidFill>
@@ -10537,7 +10537,7 @@
                         </a:rPr>
                         <a:t>ㅏ</a:t>
                       </a:r>
-                      <a:endParaRPr lang="en-US" sz="3200" dirty="0">
+                      <a:endParaRPr lang="en-US" sz="4500" dirty="0">
                         <a:latin typeface="맑은 고딕" charset="0"/>
                         <a:ea typeface="맑은 고딕" charset="0"/>
                         <a:cs typeface="맑은 고딕" charset="0"/>
@@ -10595,7 +10595,7 @@
                         <a:buNone/>
                       </a:pPr>
                       <a:r>
-                        <a:rPr lang="en-US" sz="3200" b="1" dirty="0">
+                        <a:rPr lang="en-US" sz="4500" b="1" dirty="0">
                           <a:solidFill>
                             <a:srgbClr val="1F2937"/>
                           </a:solidFill>
@@ -10605,7 +10605,7 @@
                         </a:rPr>
                         <a:t>ㅓ</a:t>
                       </a:r>
-                      <a:endParaRPr lang="en-US" sz="3200" dirty="0">
+                      <a:endParaRPr lang="en-US" sz="4500" dirty="0">
                         <a:latin typeface="맑은 고딕" charset="0"/>
                         <a:ea typeface="맑은 고딕" charset="0"/>
                         <a:cs typeface="맑은 고딕" charset="0"/>
@@ -10663,7 +10663,7 @@
                         <a:buNone/>
                       </a:pPr>
                       <a:r>
-                        <a:rPr lang="en-US" sz="3200" b="1" dirty="0">
+                        <a:rPr lang="en-US" sz="4500" b="1" dirty="0">
                           <a:solidFill>
                             <a:srgbClr val="1F2937"/>
                           </a:solidFill>
@@ -10673,7 +10673,7 @@
                         </a:rPr>
                         <a:t>ㅗ</a:t>
                       </a:r>
-                      <a:endParaRPr lang="en-US" sz="3200" dirty="0">
+                      <a:endParaRPr lang="en-US" sz="4500" dirty="0">
                         <a:latin typeface="맑은 고딕" charset="0"/>
                         <a:ea typeface="맑은 고딕" charset="0"/>
                         <a:cs typeface="맑은 고딕" charset="0"/>
@@ -10731,7 +10731,7 @@
                         <a:buNone/>
                       </a:pPr>
                       <a:r>
-                        <a:rPr lang="en-US" sz="3200" b="1" dirty="0">
+                        <a:rPr lang="en-US" sz="4500" b="1" dirty="0">
                           <a:solidFill>
                             <a:srgbClr val="1F2937"/>
                           </a:solidFill>
@@ -10741,7 +10741,7 @@
                         </a:rPr>
                         <a:t>ㅜ</a:t>
                       </a:r>
-                      <a:endParaRPr lang="en-US" sz="3200" dirty="0">
+                      <a:endParaRPr lang="en-US" sz="4500" dirty="0">
                         <a:latin typeface="맑은 고딕" charset="0"/>
                         <a:ea typeface="맑은 고딕" charset="0"/>
                         <a:cs typeface="맑은 고딕" charset="0"/>
@@ -10799,7 +10799,7 @@
                         <a:buNone/>
                       </a:pPr>
                       <a:r>
-                        <a:rPr lang="en-US" sz="3200" b="1" dirty="0">
+                        <a:rPr lang="en-US" sz="4500" b="1" dirty="0">
                           <a:solidFill>
                             <a:srgbClr val="1F2937"/>
                           </a:solidFill>
@@ -10809,7 +10809,7 @@
                         </a:rPr>
                         <a:t>ㅣ</a:t>
                       </a:r>
-                      <a:endParaRPr lang="en-US" sz="3200" dirty="0">
+                      <a:endParaRPr lang="en-US" sz="4500" dirty="0">
                         <a:latin typeface="맑은 고딕" charset="0"/>
                         <a:ea typeface="맑은 고딕" charset="0"/>
                         <a:cs typeface="맑은 고딕" charset="0"/>
@@ -10869,7 +10869,7 @@
                         <a:buNone/>
                       </a:pPr>
                       <a:r>
-                        <a:rPr lang="en-US" sz="3200" b="1" dirty="0">
+                        <a:rPr lang="en-US" sz="4500" b="1" dirty="0">
                           <a:solidFill>
                             <a:srgbClr val="1F2937"/>
                           </a:solidFill>
@@ -10879,7 +10879,7 @@
                         </a:rPr>
                         <a:t>ㅂ</a:t>
                       </a:r>
-                      <a:endParaRPr lang="en-US" sz="3200" dirty="0">
+                      <a:endParaRPr lang="en-US" sz="4500" dirty="0">
                         <a:latin typeface="맑은 고딕" charset="0"/>
                         <a:ea typeface="맑은 고딕" charset="0"/>
                         <a:cs typeface="맑은 고딕" charset="0"/>
@@ -11279,7 +11279,7 @@
                         <a:buNone/>
                       </a:pPr>
                       <a:r>
-                        <a:rPr lang="en-US" sz="3200" b="1" dirty="0">
+                        <a:rPr lang="en-US" sz="4500" b="1" dirty="0">
                           <a:solidFill>
                             <a:srgbClr val="1F2937"/>
                           </a:solidFill>
@@ -11289,7 +11289,7 @@
                         </a:rPr>
                         <a:t>ㅅ</a:t>
                       </a:r>
-                      <a:endParaRPr lang="en-US" sz="3200" dirty="0">
+                      <a:endParaRPr lang="en-US" sz="4500" dirty="0">
                         <a:latin typeface="맑은 고딕" charset="0"/>
                         <a:ea typeface="맑은 고딕" charset="0"/>
                         <a:cs typeface="맑은 고딕" charset="0"/>
@@ -11689,7 +11689,7 @@
                         <a:buNone/>
                       </a:pPr>
                       <a:r>
-                        <a:rPr lang="en-US" sz="3200" b="1" dirty="0">
+                        <a:rPr lang="en-US" sz="4500" b="1" dirty="0">
                           <a:solidFill>
                             <a:srgbClr val="1F2937"/>
                           </a:solidFill>
@@ -11699,7 +11699,7 @@
                         </a:rPr>
                         <a:t>ㅇ</a:t>
                       </a:r>
-                      <a:endParaRPr lang="en-US" sz="3200" dirty="0">
+                      <a:endParaRPr lang="en-US" sz="4500" dirty="0">
                         <a:latin typeface="맑은 고딕" charset="0"/>
                         <a:ea typeface="맑은 고딕" charset="0"/>
                         <a:cs typeface="맑은 고딕" charset="0"/>
@@ -12099,7 +12099,7 @@
                         <a:buNone/>
                       </a:pPr>
                       <a:r>
-                        <a:rPr lang="en-US" sz="3200" b="1" dirty="0">
+                        <a:rPr lang="en-US" sz="4500" b="1" dirty="0">
                           <a:solidFill>
                             <a:srgbClr val="1F2937"/>
                           </a:solidFill>
@@ -12109,7 +12109,7 @@
                         </a:rPr>
                         <a:t>ㅈ</a:t>
                       </a:r>
-                      <a:endParaRPr lang="en-US" sz="3200" dirty="0">
+                      <a:endParaRPr lang="en-US" sz="4500" dirty="0">
                         <a:latin typeface="맑은 고딕" charset="0"/>
                         <a:ea typeface="맑은 고딕" charset="0"/>
                         <a:cs typeface="맑은 고딕" charset="0"/>
@@ -12509,7 +12509,7 @@
                         <a:buNone/>
                       </a:pPr>
                       <a:r>
-                        <a:rPr lang="en-US" sz="3200" b="1" dirty="0">
+                        <a:rPr lang="en-US" sz="4500" b="1" dirty="0">
                           <a:solidFill>
                             <a:srgbClr val="1F2937"/>
                           </a:solidFill>
@@ -12519,7 +12519,7 @@
                         </a:rPr>
                         <a:t>ㅎ</a:t>
                       </a:r>
-                      <a:endParaRPr lang="en-US" sz="3200" dirty="0">
+                      <a:endParaRPr lang="en-US" sz="4500" dirty="0">
                         <a:latin typeface="맑은 고딕" charset="0"/>
                         <a:ea typeface="맑은 고딕" charset="0"/>
                         <a:cs typeface="맑은 고딕" charset="0"/>

--- a/dist/초1/국어/한글/초1_국어_한글_03_받침없는글자_학생용.pptx
+++ b/dist/초1/국어/한글/초1_국어_한글_03_받침없는글자_학생용.pptx
@@ -119,20 +119,20 @@
   <p:extLst>
     <p:ext uri="{521415D9-36F7-43E2-AB2F-B90AF26B5E84}">
       <p14:sectionLst xmlns:p14="http://schemas.microsoft.com/office/powerpoint/2010/main">
-        <p14:section name="도입" id="{20c31dba-bc3b-01a2-eb8a-c22204e7bea8}">
+        <p14:section name="도입" id="{7fb92dc0-6de6-8900-c679-3410ed8c439d}">
           <p14:sldIdLst>
             <p14:sldId id="256"/>
             <p14:sldId id="257"/>
           </p14:sldIdLst>
         </p14:section>
-        <p14:section name="개념" id="{baee1cf8-a10c-191a-3d09-89b4f72dbd87}">
+        <p14:section name="개념" id="{e3461d2c-1d55-7215-1d1f-9fc850975958}">
           <p14:sldIdLst>
             <p14:sldId id="258"/>
             <p14:sldId id="259"/>
             <p14:sldId id="260"/>
           </p14:sldIdLst>
         </p14:section>
-        <p14:section name="연습" id="{59eb1a63-e420-ffd9-f85e-267d22742c45}">
+        <p14:section name="연습" id="{75b39f61-5222-767e-5980-e1c390a6d89b}">
           <p14:sldIdLst>
             <p14:sldId id="261"/>
             <p14:sldId id="262"/>
@@ -140,18 +140,18 @@
             <p14:sldId id="264"/>
           </p14:sldIdLst>
         </p14:section>
-        <p14:section name="확인" id="{4fdf7164-8bad-c56d-8769-ab8a3e4609f5}">
+        <p14:section name="확인" id="{e5a31ce6-05f3-2110-4121-6ca09657f8e6}">
           <p14:sldIdLst>
             <p14:sldId id="265"/>
             <p14:sldId id="266"/>
           </p14:sldIdLst>
         </p14:section>
-        <p14:section name="정리" id="{1758be5f-b2ce-d520-494b-34f07ccb4de0}">
+        <p14:section name="정리" id="{66dc6425-2011-27fb-f48d-3450f19cf112}">
           <p14:sldIdLst>
             <p14:sldId id="267"/>
           </p14:sldIdLst>
         </p14:section>
-        <p14:section name="보충" id="{0747509c-3cbe-0090-76ab-29ea0da0600b}">
+        <p14:section name="보충" id="{1a17e009-cadb-e596-afef-0322eafd1b25}">
           <p14:sldIdLst>
             <p14:sldId id="268"/>
           </p14:sldIdLst>
@@ -7374,7 +7374,7 @@
           </p:nvPr>
         </p:nvGraphicFramePr>
         <p:xfrm>
-          <a:off x="1156716" y="2164080"/>
+          <a:off x="1156716" y="2225040"/>
           <a:ext cx="9875520" cy="914400"/>
         </p:xfrm>
         <a:graphic>
@@ -7389,7 +7389,7 @@
                 <a:gridCol w="1645920"/>
                 <a:gridCol w="1645920"/>
               </a:tblGrid>
-              <a:tr h="650240">
+              <a:tr h="629920">
                 <a:tc>
                   <a:txBody>
                     <a:bodyPr/>
@@ -7788,7 +7788,7 @@
                   </a:tcPr>
                 </a:tc>
               </a:tr>
-              <a:tr h="650240">
+              <a:tr h="629920">
                 <a:tc>
                   <a:txBody>
                     <a:bodyPr/>
@@ -8198,7 +8198,7 @@
                   </a:tcPr>
                 </a:tc>
               </a:tr>
-              <a:tr h="650240">
+              <a:tr h="629920">
                 <a:tc>
                   <a:txBody>
                     <a:bodyPr/>
@@ -8608,7 +8608,7 @@
                   </a:tcPr>
                 </a:tc>
               </a:tr>
-              <a:tr h="650240">
+              <a:tr h="629920">
                 <a:tc>
                   <a:txBody>
                     <a:bodyPr/>
@@ -9018,7 +9018,7 @@
                   </a:tcPr>
                 </a:tc>
               </a:tr>
-              <a:tr h="650240">
+              <a:tr h="629920">
                 <a:tc>
                   <a:txBody>
                     <a:bodyPr/>
@@ -9428,7 +9428,7 @@
                   </a:tcPr>
                 </a:tc>
               </a:tr>
-              <a:tr h="650240">
+              <a:tr h="629920">
                 <a:tc>
                   <a:txBody>
                     <a:bodyPr/>
@@ -10445,7 +10445,7 @@
           </p:nvPr>
         </p:nvGraphicFramePr>
         <p:xfrm>
-          <a:off x="1156716" y="2164080"/>
+          <a:off x="1156716" y="2225040"/>
           <a:ext cx="9875520" cy="914400"/>
         </p:xfrm>
         <a:graphic>
@@ -10460,7 +10460,7 @@
                 <a:gridCol w="1645920"/>
                 <a:gridCol w="1645920"/>
               </a:tblGrid>
-              <a:tr h="650240">
+              <a:tr h="629920">
                 <a:tc>
                   <a:txBody>
                     <a:bodyPr/>
@@ -10859,7 +10859,7 @@
                   </a:tcPr>
                 </a:tc>
               </a:tr>
-              <a:tr h="650240">
+              <a:tr h="629920">
                 <a:tc>
                   <a:txBody>
                     <a:bodyPr/>
@@ -11269,7 +11269,7 @@
                   </a:tcPr>
                 </a:tc>
               </a:tr>
-              <a:tr h="650240">
+              <a:tr h="629920">
                 <a:tc>
                   <a:txBody>
                     <a:bodyPr/>
@@ -11679,7 +11679,7 @@
                   </a:tcPr>
                 </a:tc>
               </a:tr>
-              <a:tr h="650240">
+              <a:tr h="629920">
                 <a:tc>
                   <a:txBody>
                     <a:bodyPr/>
@@ -12089,7 +12089,7 @@
                   </a:tcPr>
                 </a:tc>
               </a:tr>
-              <a:tr h="650240">
+              <a:tr h="629920">
                 <a:tc>
                   <a:txBody>
                     <a:bodyPr/>
@@ -12499,7 +12499,7 @@
                   </a:tcPr>
                 </a:tc>
               </a:tr>
-              <a:tr h="650240">
+              <a:tr h="629920">
                 <a:tc>
                   <a:txBody>
                     <a:bodyPr/>
